--- a/presentations/wcag-a11y.pptx
+++ b/presentations/wcag-a11y.pptx
@@ -16,6 +16,7 @@
     <p:sldId id="264" r:id="rId10"/>
     <p:sldId id="265" r:id="rId11"/>
     <p:sldId id="266" r:id="rId12"/>
+    <p:sldId id="276" r:id="rId27"/>
     <p:sldId id="267" r:id="rId13"/>
     <p:sldId id="268" r:id="rId14"/>
     <p:sldId id="269" r:id="rId15"/>
@@ -4033,24 +4034,14 @@
           <a:ln/>
         </p:spPr>
         <p:txBody>
-          <a:bodyPr wrap="square" lIns="0" tIns="0" rIns="0" bIns="0" rtlCol="0" anchor="ctr"/>
-          <a:lstStyle/>
-          <a:p>
-            <a:pPr indent="0" marL="0">
-              <a:buNone/>
-            </a:pPr>
-            <a:r>
-              <a:rPr lang="en-US" sz="1500" b="1" dirty="0">
-                <a:solidFill>
-                  <a:srgbClr val="1E293B"/>
-                </a:solidFill>
-                <a:latin typeface="Calibri" pitchFamily="34" charset="0"/>
-                <a:ea typeface="Calibri" pitchFamily="34" charset="-122"/>
-                <a:cs typeface="Calibri" pitchFamily="34" charset="-120"/>
-              </a:rPr>
-              <a:t>Minimum</a:t>
-            </a:r>
-            <a:endParaRPr lang="en-US" sz="1500" dirty="0"/>
+          <a:bodyPr wrap="square" lIns="0" tIns="0" rIns="0" bIns="0" rtlCol="0" anchor="ctr">
+            <a:normAutofit/>
+          </a:bodyPr>
+          <a:lstStyle/>
+          <a:p>
+            <a:r>
+              <a:t>Site is broken</a:t>
+            </a:r>
           </a:p>
         </p:txBody>
       </p:sp>
@@ -4072,24 +4063,24 @@
           <a:ln/>
         </p:spPr>
         <p:txBody>
-          <a:bodyPr wrap="square" lIns="0" tIns="0" rIns="0" bIns="0" rtlCol="0" anchor="ctr"/>
-          <a:lstStyle/>
-          <a:p>
-            <a:pPr indent="0" marL="0">
-              <a:buNone/>
-            </a:pPr>
-            <a:r>
-              <a:rPr lang="en-US" sz="1200" dirty="0">
-                <a:solidFill>
-                  <a:srgbClr val="5B6B7C"/>
-                </a:solidFill>
-                <a:latin typeface="Calibri" pitchFamily="34" charset="0"/>
-                <a:ea typeface="Calibri" pitchFamily="34" charset="-122"/>
-                <a:cs typeface="Calibri" pitchFamily="34" charset="-120"/>
-              </a:rPr>
-              <a:t>Most critical barriers. Failing Level A means the site is largely unusable with assistive tech.</a:t>
-            </a:r>
-            <a:endParaRPr lang="en-US" sz="1200" dirty="0"/>
+          <a:bodyPr wrap="square" lIns="0" tIns="0" rIns="0" bIns="0" rtlCol="0" anchor="ctr">
+            <a:normAutofit/>
+          </a:bodyPr>
+          <a:lstStyle/>
+          <a:p>
+            <a:r>
+              <a:t>Image without alt text → screen reader says nothing.</a:t>
+            </a:r>
+          </a:p>
+          <a:p>
+            <a:r>
+              <a:t>No keyboard navigation → motor-impaired user completely blocked.</a:t>
+            </a:r>
+          </a:p>
+          <a:p>
+            <a:r>
+              <a:t>30 criteria. Failing even one = site is inaccessible.</a:t>
+            </a:r>
           </a:p>
         </p:txBody>
       </p:sp>
@@ -4179,24 +4170,14 @@
           <a:ln/>
         </p:spPr>
         <p:txBody>
-          <a:bodyPr wrap="square" lIns="0" tIns="0" rIns="0" bIns="0" rtlCol="0" anchor="ctr"/>
-          <a:lstStyle/>
-          <a:p>
-            <a:pPr indent="0" marL="0">
-              <a:buNone/>
-            </a:pPr>
-            <a:r>
-              <a:rPr lang="en-US" sz="1500" b="1" dirty="0">
-                <a:solidFill>
-                  <a:srgbClr val="CCFBF1"/>
-                </a:solidFill>
-                <a:latin typeface="Calibri" pitchFamily="34" charset="0"/>
-                <a:ea typeface="Calibri" pitchFamily="34" charset="-122"/>
-                <a:cs typeface="Calibri" pitchFamily="34" charset="-120"/>
-              </a:rPr>
-              <a:t>The global target</a:t>
-            </a:r>
-            <a:endParaRPr lang="en-US" sz="1500" dirty="0"/>
+          <a:bodyPr wrap="square" lIns="0" tIns="0" rIns="0" bIns="0" rtlCol="0" anchor="ctr">
+            <a:normAutofit/>
+          </a:bodyPr>
+          <a:lstStyle/>
+          <a:p>
+            <a:r>
+              <a:t>Law requires this</a:t>
+            </a:r>
           </a:p>
         </p:txBody>
       </p:sp>
@@ -4218,24 +4199,29 @@
           <a:ln/>
         </p:spPr>
         <p:txBody>
-          <a:bodyPr wrap="square" lIns="0" tIns="0" rIns="0" bIns="0" rtlCol="0" anchor="ctr"/>
-          <a:lstStyle/>
-          <a:p>
-            <a:pPr indent="0" marL="0">
-              <a:buNone/>
-            </a:pPr>
-            <a:r>
-              <a:rPr lang="en-US" sz="1200" dirty="0">
-                <a:solidFill>
-                  <a:srgbClr val="E6FFFA"/>
-                </a:solidFill>
-                <a:latin typeface="Calibri" pitchFamily="34" charset="0"/>
-                <a:ea typeface="Calibri" pitchFamily="34" charset="-122"/>
-                <a:cs typeface="Calibri" pitchFamily="34" charset="-120"/>
-              </a:rPr>
-              <a:t>56 criteria (A + AA). Required by EAA, EN 301 549, ADA guidance, Section 508. This is our goal.</a:t>
-            </a:r>
-            <a:endParaRPr lang="en-US" sz="1200" dirty="0"/>
+          <a:bodyPr wrap="square" lIns="0" tIns="0" rIns="0" bIns="0" rtlCol="0" anchor="ctr">
+            <a:normAutofit/>
+          </a:bodyPr>
+          <a:lstStyle/>
+          <a:p>
+            <a:r>
+              <a:t>Contrast ratio below 4.5:1 → low-vision user can't read.</a:t>
+            </a:r>
+          </a:p>
+          <a:p>
+            <a:r>
+              <a:t>Paste blocked on password fields → excludes password managers.</a:t>
+            </a:r>
+          </a:p>
+          <a:p>
+            <a:r>
+              <a:t>Error message just says "Invalid" → cognitive overload.</a:t>
+            </a:r>
+          </a:p>
+          <a:p>
+            <a:r>
+              <a:t>56 criteria (A + AA). Required by EAA &amp; ADA.</a:t>
+            </a:r>
           </a:p>
         </p:txBody>
       </p:sp>
@@ -4323,24 +4309,14 @@
           <a:ln/>
         </p:spPr>
         <p:txBody>
-          <a:bodyPr wrap="square" lIns="0" tIns="0" rIns="0" bIns="0" rtlCol="0" anchor="ctr"/>
-          <a:lstStyle/>
-          <a:p>
-            <a:pPr indent="0" marL="0">
-              <a:buNone/>
-            </a:pPr>
-            <a:r>
-              <a:rPr lang="en-US" sz="1500" b="1" dirty="0">
-                <a:solidFill>
-                  <a:srgbClr val="1E293B"/>
-                </a:solidFill>
-                <a:latin typeface="Calibri" pitchFamily="34" charset="0"/>
-                <a:ea typeface="Calibri" pitchFamily="34" charset="-122"/>
-                <a:cs typeface="Calibri" pitchFamily="34" charset="-120"/>
-              </a:rPr>
-              <a:t>Enhanced</a:t>
-            </a:r>
-            <a:endParaRPr lang="en-US" sz="1500" dirty="0"/>
+          <a:bodyPr wrap="square" lIns="0" tIns="0" rIns="0" bIns="0" rtlCol="0" anchor="ctr">
+            <a:normAutofit/>
+          </a:bodyPr>
+          <a:lstStyle/>
+          <a:p>
+            <a:r>
+              <a:t>Above and beyond</a:t>
+            </a:r>
           </a:p>
         </p:txBody>
       </p:sp>
@@ -4362,24 +4338,29 @@
           <a:ln/>
         </p:spPr>
         <p:txBody>
-          <a:bodyPr wrap="square" lIns="0" tIns="0" rIns="0" bIns="0" rtlCol="0" anchor="ctr"/>
-          <a:lstStyle/>
-          <a:p>
-            <a:pPr indent="0" marL="0">
-              <a:buNone/>
-            </a:pPr>
-            <a:r>
-              <a:rPr lang="en-US" sz="1200" dirty="0">
-                <a:solidFill>
-                  <a:srgbClr val="5B6B7C"/>
-                </a:solidFill>
-                <a:latin typeface="Calibri" pitchFamily="34" charset="0"/>
-                <a:ea typeface="Calibri" pitchFamily="34" charset="-122"/>
-                <a:cs typeface="Calibri" pitchFamily="34" charset="-120"/>
-              </a:rPr>
-              <a:t>Highest level. Not required by law; not all criteria apply to all content. Adopt selectively.</a:t>
-            </a:r>
-            <a:endParaRPr lang="en-US" sz="1200" dirty="0"/>
+          <a:bodyPr wrap="square" lIns="0" tIns="0" rIns="0" bIns="0" rtlCol="0" anchor="ctr">
+            <a:normAutofit/>
+          </a:bodyPr>
+          <a:lstStyle/>
+          <a:p>
+            <a:r>
+              <a:t>Contrast ratio ≥ 7:1 (vs 4.5:1 for AA).</a:t>
+            </a:r>
+          </a:p>
+          <a:p>
+            <a:r>
+              <a:t>Sign language versions of all video content.</a:t>
+            </a:r>
+          </a:p>
+          <a:p>
+            <a:r>
+              <a:t>No session timeouts — ever.</a:t>
+            </a:r>
+          </a:p>
+          <a:p>
+            <a:r>
+              <a:t>87 criteria. Adopt selectively where feasible.</a:t>
+            </a:r>
           </a:p>
         </p:txBody>
       </p:sp>
@@ -4391,7 +4372,7 @@
         </p:nvSpPr>
         <p:spPr>
           <a:xfrm>
-            <a:off x="457200" y="4572000"/>
+            <a:off x="457200" y="4389960"/>
             <a:ext cx="8229600" cy="320040"/>
           </a:xfrm>
           <a:prstGeom prst="rect">
@@ -4401,7 +4382,9 @@
           <a:ln/>
         </p:spPr>
         <p:txBody>
-          <a:bodyPr wrap="square" lIns="0" tIns="0" rIns="0" bIns="0" rtlCol="0" anchor="ctr"/>
+          <a:bodyPr wrap="square" lIns="0" tIns="0" rIns="0" bIns="0" rtlCol="0" anchor="ctr">
+            <a:normAutofit/>
+          </a:bodyPr>
           <a:lstStyle/>
           <a:p>
             <a:pPr algn="ctr" indent="0" marL="0">
@@ -6073,7 +6056,7 @@
         </p:nvSpPr>
         <p:spPr>
           <a:xfrm>
-            <a:off x="457200" y="4681728"/>
+            <a:off x="457200" y="4435680"/>
             <a:ext cx="8229600" cy="274320"/>
           </a:xfrm>
           <a:prstGeom prst="rect">
@@ -6083,7 +6066,9 @@
           <a:ln/>
         </p:spPr>
         <p:txBody>
-          <a:bodyPr wrap="square" lIns="0" tIns="0" rIns="0" bIns="0" rtlCol="0" anchor="ctr"/>
+          <a:bodyPr wrap="square" lIns="0" tIns="0" rIns="0" bIns="0" rtlCol="0" anchor="ctr">
+            <a:normAutofit/>
+          </a:bodyPr>
           <a:lstStyle/>
           <a:p>
             <a:pPr indent="0" marL="0">
@@ -7724,7 +7709,7 @@
         </p:nvSpPr>
         <p:spPr>
           <a:xfrm>
-            <a:off x="640080" y="4590288"/>
+            <a:off x="640080" y="4362528"/>
             <a:ext cx="7863840" cy="347472"/>
           </a:xfrm>
           <a:prstGeom prst="rect">
@@ -7734,7 +7719,9 @@
           <a:ln/>
         </p:spPr>
         <p:txBody>
-          <a:bodyPr wrap="square" lIns="0" tIns="0" rIns="0" bIns="0" rtlCol="0" anchor="ctr"/>
+          <a:bodyPr wrap="square" lIns="0" tIns="0" rIns="0" bIns="0" rtlCol="0" anchor="ctr">
+            <a:normAutofit/>
+          </a:bodyPr>
           <a:lstStyle/>
           <a:p>
             <a:pPr indent="0" marL="0">
@@ -9389,7 +9376,9 @@
           <a:ln/>
         </p:spPr>
         <p:txBody>
-          <a:bodyPr wrap="square" lIns="0" tIns="0" rIns="0" bIns="0" rtlCol="0" anchor="ctr"/>
+          <a:bodyPr wrap="square" lIns="0" tIns="0" rIns="0" bIns="0" rtlCol="0" anchor="ctr">
+            <a:normAutofit/>
+          </a:bodyPr>
           <a:lstStyle/>
           <a:p>
             <a:pPr indent="0" marL="0">
@@ -11782,7 +11771,7 @@
         </p:nvSpPr>
         <p:spPr>
           <a:xfrm>
-            <a:off x="594360" y="4681728"/>
+            <a:off x="594360" y="4389960"/>
             <a:ext cx="7955280" cy="320040"/>
           </a:xfrm>
           <a:prstGeom prst="rect">
@@ -11792,7 +11781,9 @@
           <a:ln/>
         </p:spPr>
         <p:txBody>
-          <a:bodyPr wrap="square" lIns="0" tIns="0" rIns="0" bIns="0" rtlCol="0" anchor="ctr"/>
+          <a:bodyPr wrap="square" lIns="0" tIns="0" rIns="0" bIns="0" rtlCol="0" anchor="ctr">
+            <a:normAutofit/>
+          </a:bodyPr>
           <a:lstStyle/>
           <a:p>
             <a:pPr indent="0" marL="0">
@@ -11810,6 +11801,860 @@
               <a:t>Resources:  w3.org/WAI  ·  WCAG 2.2 quick reference  ·  WebAIM  ·  MDN Accessibility  ·  a11yproject.com</a:t>
             </a:r>
             <a:endParaRPr lang="en-US" sz="1200" dirty="0"/>
+          </a:p>
+        </p:txBody>
+      </p:sp>
+    </p:spTree>
+  </p:cSld>
+  <p:clrMapOvr>
+    <a:masterClrMapping/>
+  </p:clrMapOvr>
+</p:sld>
+</file>
+
+<file path=ppt/slides/slide21.xml><?xml version="1.0" encoding="utf-8"?>
+<p:sld xmlns:a="http://schemas.openxmlformats.org/drawingml/2006/main" xmlns:p="http://schemas.openxmlformats.org/presentationml/2006/main" xmlns:r="http://schemas.openxmlformats.org/officeDocument/2006/relationships">
+  <p:cSld>
+    <p:spTree>
+      <p:nvGrpSpPr>
+        <p:cNvPr id="1" name=""/>
+        <p:cNvGrpSpPr/>
+        <p:nvPr/>
+      </p:nvGrpSpPr>
+      <p:grpSpPr/>
+      <p:sp>
+        <p:nvSpPr>
+          <p:cNvPr id="2" name="TextBox 1"/>
+          <p:cNvSpPr txBox="1"/>
+          <p:nvPr/>
+        </p:nvSpPr>
+        <p:spPr>
+          <a:xfrm>
+            <a:off x="457200" y="200000"/>
+            <a:ext cx="8229600" cy="500000"/>
+          </a:xfrm>
+          <a:prstGeom prst="rect">
+            <a:avLst/>
+          </a:prstGeom>
+          <a:noFill/>
+        </p:spPr>
+        <p:txBody>
+          <a:bodyPr wrap="square">
+            <a:normAutofit/>
+          </a:bodyPr>
+          <a:lstStyle/>
+          <a:p>
+            <a:pPr algn="l"/>
+            <a:r>
+              <a:rPr b="1" sz="2800">
+                <a:solidFill>
+                  <a:srgbClr val="1E293B"/>
+                </a:solidFill>
+              </a:rPr>
+              <a:t>What Each Level Means in Practice</a:t>
+            </a:r>
+          </a:p>
+        </p:txBody>
+      </p:sp>
+      <p:sp>
+        <p:nvSpPr>
+          <p:cNvPr id="3" name="TextBox 2"/>
+          <p:cNvSpPr txBox="1"/>
+          <p:nvPr/>
+        </p:nvSpPr>
+        <p:spPr>
+          <a:xfrm>
+            <a:off x="457200" y="690000"/>
+            <a:ext cx="8229600" cy="300000"/>
+          </a:xfrm>
+          <a:prstGeom prst="rect">
+            <a:avLst/>
+          </a:prstGeom>
+          <a:noFill/>
+        </p:spPr>
+        <p:txBody>
+          <a:bodyPr wrap="square">
+            <a:normAutofit/>
+          </a:bodyPr>
+          <a:lstStyle/>
+          <a:p>
+            <a:pPr algn="l"/>
+            <a:r>
+              <a:rPr b="0" sz="1600">
+                <a:solidFill>
+                  <a:srgbClr val="334A47"/>
+                </a:solidFill>
+              </a:rPr>
+              <a:t>Three questions: Is it broken? Does it meet the law? Is it excellent?</a:t>
+            </a:r>
+          </a:p>
+        </p:txBody>
+      </p:sp>
+      <p:sp>
+        <p:nvSpPr>
+          <p:cNvPr id="4" name="Rectangle 3"/>
+          <p:cNvSpPr/>
+          <p:nvPr/>
+        </p:nvSpPr>
+        <p:spPr>
+          <a:xfrm>
+            <a:off x="457200" y="1100000"/>
+            <a:ext cx="2692400" cy="3500000"/>
+          </a:xfrm>
+          <a:prstGeom prst="rect">
+            <a:avLst/>
+          </a:prstGeom>
+          <a:solidFill>
+            <a:srgbClr val="E6F4F2"/>
+          </a:solidFill>
+          <a:ln>
+            <a:noFill/>
+          </a:ln>
+        </p:spPr>
+        <p:style>
+          <a:lnRef idx="1">
+            <a:schemeClr val="accent1"/>
+          </a:lnRef>
+          <a:fillRef idx="3">
+            <a:schemeClr val="accent1"/>
+          </a:fillRef>
+          <a:effectRef idx="2">
+            <a:schemeClr val="accent1"/>
+          </a:effectRef>
+          <a:fontRef idx="minor">
+            <a:schemeClr val="lt1"/>
+          </a:fontRef>
+        </p:style>
+        <p:txBody>
+          <a:bodyPr rtlCol="0" anchor="ctr"/>
+          <a:lstStyle/>
+          <a:p>
+            <a:pPr algn="ctr"/>
+          </a:p>
+        </p:txBody>
+      </p:sp>
+      <p:sp>
+        <p:nvSpPr>
+          <p:cNvPr id="5" name="TextBox 4"/>
+          <p:cNvSpPr txBox="1"/>
+          <p:nvPr/>
+        </p:nvSpPr>
+        <p:spPr>
+          <a:xfrm>
+            <a:off x="607200" y="1250000"/>
+            <a:ext cx="2392400" cy="600000"/>
+          </a:xfrm>
+          <a:prstGeom prst="rect">
+            <a:avLst/>
+          </a:prstGeom>
+          <a:noFill/>
+        </p:spPr>
+        <p:txBody>
+          <a:bodyPr wrap="square">
+            <a:normAutofit/>
+          </a:bodyPr>
+          <a:lstStyle/>
+          <a:p>
+            <a:pPr algn="ctr"/>
+            <a:r>
+              <a:rPr b="1" sz="5200">
+                <a:solidFill>
+                  <a:srgbClr val="0F766E"/>
+                </a:solidFill>
+              </a:rPr>
+              <a:t>A</a:t>
+            </a:r>
+          </a:p>
+        </p:txBody>
+      </p:sp>
+      <p:sp>
+        <p:nvSpPr>
+          <p:cNvPr id="6" name="Rectangle 5"/>
+          <p:cNvSpPr/>
+          <p:nvPr/>
+        </p:nvSpPr>
+        <p:spPr>
+          <a:xfrm>
+            <a:off x="607200" y="1930000"/>
+            <a:ext cx="2392400" cy="6000"/>
+          </a:xfrm>
+          <a:prstGeom prst="rect">
+            <a:avLst/>
+          </a:prstGeom>
+          <a:solidFill>
+            <a:srgbClr val="0F766E"/>
+          </a:solidFill>
+          <a:ln>
+            <a:noFill/>
+          </a:ln>
+        </p:spPr>
+        <p:style>
+          <a:lnRef idx="1">
+            <a:schemeClr val="accent1"/>
+          </a:lnRef>
+          <a:fillRef idx="3">
+            <a:schemeClr val="accent1"/>
+          </a:fillRef>
+          <a:effectRef idx="2">
+            <a:schemeClr val="accent1"/>
+          </a:effectRef>
+          <a:fontRef idx="minor">
+            <a:schemeClr val="lt1"/>
+          </a:fontRef>
+        </p:style>
+        <p:txBody>
+          <a:bodyPr rtlCol="0" anchor="ctr"/>
+          <a:lstStyle/>
+          <a:p>
+            <a:pPr algn="ctr"/>
+          </a:p>
+        </p:txBody>
+      </p:sp>
+      <p:sp>
+        <p:nvSpPr>
+          <p:cNvPr id="7" name="TextBox 6"/>
+          <p:cNvSpPr txBox="1"/>
+          <p:nvPr/>
+        </p:nvSpPr>
+        <p:spPr>
+          <a:xfrm>
+            <a:off x="607200" y="2010000"/>
+            <a:ext cx="2392400" cy="280000"/>
+          </a:xfrm>
+          <a:prstGeom prst="rect">
+            <a:avLst/>
+          </a:prstGeom>
+          <a:noFill/>
+        </p:spPr>
+        <p:txBody>
+          <a:bodyPr wrap="square">
+            <a:normAutofit/>
+          </a:bodyPr>
+          <a:lstStyle/>
+          <a:p>
+            <a:pPr algn="ctr"/>
+            <a:r>
+              <a:rPr b="1" sz="1400">
+                <a:solidFill>
+                  <a:srgbClr val="0F766E"/>
+                </a:solidFill>
+              </a:rPr>
+              <a:t>Site is broken</a:t>
+            </a:r>
+          </a:p>
+        </p:txBody>
+      </p:sp>
+      <p:sp>
+        <p:nvSpPr>
+          <p:cNvPr id="8" name="TextBox 7"/>
+          <p:cNvSpPr txBox="1"/>
+          <p:nvPr/>
+        </p:nvSpPr>
+        <p:spPr>
+          <a:xfrm>
+            <a:off x="607200" y="2310000"/>
+            <a:ext cx="2392400" cy="400000"/>
+          </a:xfrm>
+          <a:prstGeom prst="rect">
+            <a:avLst/>
+          </a:prstGeom>
+          <a:noFill/>
+        </p:spPr>
+        <p:txBody>
+          <a:bodyPr wrap="square">
+            <a:normAutofit/>
+          </a:bodyPr>
+          <a:lstStyle/>
+          <a:p>
+            <a:pPr algn="l"/>
+            <a:r>
+              <a:rPr b="0" sz="1300">
+                <a:solidFill>
+                  <a:srgbClr val="334A47"/>
+                </a:solidFill>
+              </a:rPr>
+              <a:t>• Image has no alt text → screen reader says nothing</a:t>
+            </a:r>
+          </a:p>
+        </p:txBody>
+      </p:sp>
+      <p:sp>
+        <p:nvSpPr>
+          <p:cNvPr id="9" name="TextBox 8"/>
+          <p:cNvSpPr txBox="1"/>
+          <p:nvPr/>
+        </p:nvSpPr>
+        <p:spPr>
+          <a:xfrm>
+            <a:off x="607200" y="2730000"/>
+            <a:ext cx="2392400" cy="400000"/>
+          </a:xfrm>
+          <a:prstGeom prst="rect">
+            <a:avLst/>
+          </a:prstGeom>
+          <a:noFill/>
+        </p:spPr>
+        <p:txBody>
+          <a:bodyPr wrap="square">
+            <a:normAutofit/>
+          </a:bodyPr>
+          <a:lstStyle/>
+          <a:p>
+            <a:pPr algn="l"/>
+            <a:r>
+              <a:rPr b="0" sz="1300">
+                <a:solidFill>
+                  <a:srgbClr val="334A47"/>
+                </a:solidFill>
+              </a:rPr>
+              <a:t>• No keyboard navigation → motor-impaired user blocked</a:t>
+            </a:r>
+          </a:p>
+        </p:txBody>
+      </p:sp>
+      <p:sp>
+        <p:nvSpPr>
+          <p:cNvPr id="10" name="TextBox 9"/>
+          <p:cNvSpPr txBox="1"/>
+          <p:nvPr/>
+        </p:nvSpPr>
+        <p:spPr>
+          <a:xfrm>
+            <a:off x="607200" y="3150000"/>
+            <a:ext cx="2392400" cy="400000"/>
+          </a:xfrm>
+          <a:prstGeom prst="rect">
+            <a:avLst/>
+          </a:prstGeom>
+          <a:noFill/>
+        </p:spPr>
+        <p:txBody>
+          <a:bodyPr wrap="square">
+            <a:normAutofit/>
+          </a:bodyPr>
+          <a:lstStyle/>
+          <a:p>
+            <a:pPr algn="l"/>
+            <a:r>
+              <a:rPr b="0" sz="1300">
+                <a:solidFill>
+                  <a:srgbClr val="334A47"/>
+                </a:solidFill>
+              </a:rPr>
+              <a:t>• No captions on video → deaf user excluded</a:t>
+            </a:r>
+          </a:p>
+        </p:txBody>
+      </p:sp>
+      <p:sp>
+        <p:nvSpPr>
+          <p:cNvPr id="11" name="Rectangle 10"/>
+          <p:cNvSpPr/>
+          <p:nvPr/>
+        </p:nvSpPr>
+        <p:spPr>
+          <a:xfrm>
+            <a:off x="3225800" y="1100000"/>
+            <a:ext cx="2692400" cy="3500000"/>
+          </a:xfrm>
+          <a:prstGeom prst="rect">
+            <a:avLst/>
+          </a:prstGeom>
+          <a:solidFill>
+            <a:srgbClr val="115E59"/>
+          </a:solidFill>
+          <a:ln>
+            <a:noFill/>
+          </a:ln>
+        </p:spPr>
+        <p:style>
+          <a:lnRef idx="1">
+            <a:schemeClr val="accent1"/>
+          </a:lnRef>
+          <a:fillRef idx="3">
+            <a:schemeClr val="accent1"/>
+          </a:fillRef>
+          <a:effectRef idx="2">
+            <a:schemeClr val="accent1"/>
+          </a:effectRef>
+          <a:fontRef idx="minor">
+            <a:schemeClr val="lt1"/>
+          </a:fontRef>
+        </p:style>
+        <p:txBody>
+          <a:bodyPr rtlCol="0" anchor="ctr"/>
+          <a:lstStyle/>
+          <a:p>
+            <a:pPr algn="ctr"/>
+          </a:p>
+        </p:txBody>
+      </p:sp>
+      <p:sp>
+        <p:nvSpPr>
+          <p:cNvPr id="12" name="TextBox 11"/>
+          <p:cNvSpPr txBox="1"/>
+          <p:nvPr/>
+        </p:nvSpPr>
+        <p:spPr>
+          <a:xfrm>
+            <a:off x="3375800" y="1250000"/>
+            <a:ext cx="2392400" cy="600000"/>
+          </a:xfrm>
+          <a:prstGeom prst="rect">
+            <a:avLst/>
+          </a:prstGeom>
+          <a:noFill/>
+        </p:spPr>
+        <p:txBody>
+          <a:bodyPr wrap="square">
+            <a:normAutofit/>
+          </a:bodyPr>
+          <a:lstStyle/>
+          <a:p>
+            <a:pPr algn="ctr"/>
+            <a:r>
+              <a:rPr b="1" sz="5200">
+                <a:solidFill>
+                  <a:srgbClr val="FFFFFF"/>
+                </a:solidFill>
+              </a:rPr>
+              <a:t>AA</a:t>
+            </a:r>
+          </a:p>
+        </p:txBody>
+      </p:sp>
+      <p:sp>
+        <p:nvSpPr>
+          <p:cNvPr id="13" name="Rectangle 12"/>
+          <p:cNvSpPr/>
+          <p:nvPr/>
+        </p:nvSpPr>
+        <p:spPr>
+          <a:xfrm>
+            <a:off x="3375800" y="1930000"/>
+            <a:ext cx="2392400" cy="6000"/>
+          </a:xfrm>
+          <a:prstGeom prst="rect">
+            <a:avLst/>
+          </a:prstGeom>
+          <a:solidFill>
+            <a:srgbClr val="FFFFFF"/>
+          </a:solidFill>
+          <a:ln>
+            <a:noFill/>
+          </a:ln>
+        </p:spPr>
+        <p:style>
+          <a:lnRef idx="1">
+            <a:schemeClr val="accent1"/>
+          </a:lnRef>
+          <a:fillRef idx="3">
+            <a:schemeClr val="accent1"/>
+          </a:fillRef>
+          <a:effectRef idx="2">
+            <a:schemeClr val="accent1"/>
+          </a:effectRef>
+          <a:fontRef idx="minor">
+            <a:schemeClr val="lt1"/>
+          </a:fontRef>
+        </p:style>
+        <p:txBody>
+          <a:bodyPr rtlCol="0" anchor="ctr"/>
+          <a:lstStyle/>
+          <a:p>
+            <a:pPr algn="ctr"/>
+          </a:p>
+        </p:txBody>
+      </p:sp>
+      <p:sp>
+        <p:nvSpPr>
+          <p:cNvPr id="14" name="TextBox 13"/>
+          <p:cNvSpPr txBox="1"/>
+          <p:nvPr/>
+        </p:nvSpPr>
+        <p:spPr>
+          <a:xfrm>
+            <a:off x="3375800" y="2010000"/>
+            <a:ext cx="2392400" cy="280000"/>
+          </a:xfrm>
+          <a:prstGeom prst="rect">
+            <a:avLst/>
+          </a:prstGeom>
+          <a:noFill/>
+        </p:spPr>
+        <p:txBody>
+          <a:bodyPr wrap="square">
+            <a:normAutofit/>
+          </a:bodyPr>
+          <a:lstStyle/>
+          <a:p>
+            <a:pPr algn="ctr"/>
+            <a:r>
+              <a:rPr b="1" sz="1400">
+                <a:solidFill>
+                  <a:srgbClr val="FFFFFF"/>
+                </a:solidFill>
+              </a:rPr>
+              <a:t>Law requires this</a:t>
+            </a:r>
+          </a:p>
+        </p:txBody>
+      </p:sp>
+      <p:sp>
+        <p:nvSpPr>
+          <p:cNvPr id="15" name="TextBox 14"/>
+          <p:cNvSpPr txBox="1"/>
+          <p:nvPr/>
+        </p:nvSpPr>
+        <p:spPr>
+          <a:xfrm>
+            <a:off x="3375800" y="2310000"/>
+            <a:ext cx="2392400" cy="400000"/>
+          </a:xfrm>
+          <a:prstGeom prst="rect">
+            <a:avLst/>
+          </a:prstGeom>
+          <a:noFill/>
+        </p:spPr>
+        <p:txBody>
+          <a:bodyPr wrap="square">
+            <a:normAutofit/>
+          </a:bodyPr>
+          <a:lstStyle/>
+          <a:p>
+            <a:pPr algn="l"/>
+            <a:r>
+              <a:rPr b="0" sz="1300">
+                <a:solidFill>
+                  <a:srgbClr val="FFFFFF"/>
+                </a:solidFill>
+              </a:rPr>
+              <a:t>• Text contrast below 4.5:1 → low-vision user can't read</a:t>
+            </a:r>
+          </a:p>
+        </p:txBody>
+      </p:sp>
+      <p:sp>
+        <p:nvSpPr>
+          <p:cNvPr id="16" name="TextBox 15"/>
+          <p:cNvSpPr txBox="1"/>
+          <p:nvPr/>
+        </p:nvSpPr>
+        <p:spPr>
+          <a:xfrm>
+            <a:off x="3375800" y="2730000"/>
+            <a:ext cx="2392400" cy="400000"/>
+          </a:xfrm>
+          <a:prstGeom prst="rect">
+            <a:avLst/>
+          </a:prstGeom>
+          <a:noFill/>
+        </p:spPr>
+        <p:txBody>
+          <a:bodyPr wrap="square">
+            <a:normAutofit/>
+          </a:bodyPr>
+          <a:lstStyle/>
+          <a:p>
+            <a:pPr algn="l"/>
+            <a:r>
+              <a:rPr b="0" sz="1300">
+                <a:solidFill>
+                  <a:srgbClr val="FFFFFF"/>
+                </a:solidFill>
+              </a:rPr>
+              <a:t>• Paste blocked on passwords → excludes password managers</a:t>
+            </a:r>
+          </a:p>
+        </p:txBody>
+      </p:sp>
+      <p:sp>
+        <p:nvSpPr>
+          <p:cNvPr id="17" name="TextBox 16"/>
+          <p:cNvSpPr txBox="1"/>
+          <p:nvPr/>
+        </p:nvSpPr>
+        <p:spPr>
+          <a:xfrm>
+            <a:off x="3375800" y="3150000"/>
+            <a:ext cx="2392400" cy="400000"/>
+          </a:xfrm>
+          <a:prstGeom prst="rect">
+            <a:avLst/>
+          </a:prstGeom>
+          <a:noFill/>
+        </p:spPr>
+        <p:txBody>
+          <a:bodyPr wrap="square">
+            <a:normAutofit/>
+          </a:bodyPr>
+          <a:lstStyle/>
+          <a:p>
+            <a:pPr algn="l"/>
+            <a:r>
+              <a:rPr b="0" sz="1300">
+                <a:solidFill>
+                  <a:srgbClr val="FFFFFF"/>
+                </a:solidFill>
+              </a:rPr>
+              <a:t>• Error just says "Invalid" → no guidance for fix</a:t>
+            </a:r>
+          </a:p>
+        </p:txBody>
+      </p:sp>
+      <p:sp>
+        <p:nvSpPr>
+          <p:cNvPr id="18" name="Rectangle 17"/>
+          <p:cNvSpPr/>
+          <p:nvPr/>
+        </p:nvSpPr>
+        <p:spPr>
+          <a:xfrm>
+            <a:off x="5994400" y="1100000"/>
+            <a:ext cx="2692400" cy="3500000"/>
+          </a:xfrm>
+          <a:prstGeom prst="rect">
+            <a:avLst/>
+          </a:prstGeom>
+          <a:solidFill>
+            <a:srgbClr val="E6F4F2"/>
+          </a:solidFill>
+          <a:ln>
+            <a:noFill/>
+          </a:ln>
+        </p:spPr>
+        <p:style>
+          <a:lnRef idx="1">
+            <a:schemeClr val="accent1"/>
+          </a:lnRef>
+          <a:fillRef idx="3">
+            <a:schemeClr val="accent1"/>
+          </a:fillRef>
+          <a:effectRef idx="2">
+            <a:schemeClr val="accent1"/>
+          </a:effectRef>
+          <a:fontRef idx="minor">
+            <a:schemeClr val="lt1"/>
+          </a:fontRef>
+        </p:style>
+        <p:txBody>
+          <a:bodyPr rtlCol="0" anchor="ctr"/>
+          <a:lstStyle/>
+          <a:p>
+            <a:pPr algn="ctr"/>
+          </a:p>
+        </p:txBody>
+      </p:sp>
+      <p:sp>
+        <p:nvSpPr>
+          <p:cNvPr id="19" name="TextBox 18"/>
+          <p:cNvSpPr txBox="1"/>
+          <p:nvPr/>
+        </p:nvSpPr>
+        <p:spPr>
+          <a:xfrm>
+            <a:off x="6144400" y="1250000"/>
+            <a:ext cx="2392400" cy="600000"/>
+          </a:xfrm>
+          <a:prstGeom prst="rect">
+            <a:avLst/>
+          </a:prstGeom>
+          <a:noFill/>
+        </p:spPr>
+        <p:txBody>
+          <a:bodyPr wrap="square">
+            <a:normAutofit/>
+          </a:bodyPr>
+          <a:lstStyle/>
+          <a:p>
+            <a:pPr algn="ctr"/>
+            <a:r>
+              <a:rPr b="1" sz="5200">
+                <a:solidFill>
+                  <a:srgbClr val="0F766E"/>
+                </a:solidFill>
+              </a:rPr>
+              <a:t>AAA</a:t>
+            </a:r>
+          </a:p>
+        </p:txBody>
+      </p:sp>
+      <p:sp>
+        <p:nvSpPr>
+          <p:cNvPr id="20" name="Rectangle 19"/>
+          <p:cNvSpPr/>
+          <p:nvPr/>
+        </p:nvSpPr>
+        <p:spPr>
+          <a:xfrm>
+            <a:off x="6144400" y="1930000"/>
+            <a:ext cx="2392400" cy="6000"/>
+          </a:xfrm>
+          <a:prstGeom prst="rect">
+            <a:avLst/>
+          </a:prstGeom>
+          <a:solidFill>
+            <a:srgbClr val="0F766E"/>
+          </a:solidFill>
+          <a:ln>
+            <a:noFill/>
+          </a:ln>
+        </p:spPr>
+        <p:style>
+          <a:lnRef idx="1">
+            <a:schemeClr val="accent1"/>
+          </a:lnRef>
+          <a:fillRef idx="3">
+            <a:schemeClr val="accent1"/>
+          </a:fillRef>
+          <a:effectRef idx="2">
+            <a:schemeClr val="accent1"/>
+          </a:effectRef>
+          <a:fontRef idx="minor">
+            <a:schemeClr val="lt1"/>
+          </a:fontRef>
+        </p:style>
+        <p:txBody>
+          <a:bodyPr rtlCol="0" anchor="ctr"/>
+          <a:lstStyle/>
+          <a:p>
+            <a:pPr algn="ctr"/>
+          </a:p>
+        </p:txBody>
+      </p:sp>
+      <p:sp>
+        <p:nvSpPr>
+          <p:cNvPr id="21" name="TextBox 20"/>
+          <p:cNvSpPr txBox="1"/>
+          <p:nvPr/>
+        </p:nvSpPr>
+        <p:spPr>
+          <a:xfrm>
+            <a:off x="6144400" y="2010000"/>
+            <a:ext cx="2392400" cy="280000"/>
+          </a:xfrm>
+          <a:prstGeom prst="rect">
+            <a:avLst/>
+          </a:prstGeom>
+          <a:noFill/>
+        </p:spPr>
+        <p:txBody>
+          <a:bodyPr wrap="square">
+            <a:normAutofit/>
+          </a:bodyPr>
+          <a:lstStyle/>
+          <a:p>
+            <a:pPr algn="ctr"/>
+            <a:r>
+              <a:rPr b="1" sz="1400">
+                <a:solidFill>
+                  <a:srgbClr val="0F766E"/>
+                </a:solidFill>
+              </a:rPr>
+              <a:t>Above and beyond</a:t>
+            </a:r>
+          </a:p>
+        </p:txBody>
+      </p:sp>
+      <p:sp>
+        <p:nvSpPr>
+          <p:cNvPr id="22" name="TextBox 21"/>
+          <p:cNvSpPr txBox="1"/>
+          <p:nvPr/>
+        </p:nvSpPr>
+        <p:spPr>
+          <a:xfrm>
+            <a:off x="6144400" y="2310000"/>
+            <a:ext cx="2392400" cy="400000"/>
+          </a:xfrm>
+          <a:prstGeom prst="rect">
+            <a:avLst/>
+          </a:prstGeom>
+          <a:noFill/>
+        </p:spPr>
+        <p:txBody>
+          <a:bodyPr wrap="square">
+            <a:normAutofit/>
+          </a:bodyPr>
+          <a:lstStyle/>
+          <a:p>
+            <a:pPr algn="l"/>
+            <a:r>
+              <a:rPr b="0" sz="1300">
+                <a:solidFill>
+                  <a:srgbClr val="334A47"/>
+                </a:solidFill>
+              </a:rPr>
+              <a:t>• Contrast ≥ 7:1 (vs 4.5:1 for AA)</a:t>
+            </a:r>
+          </a:p>
+        </p:txBody>
+      </p:sp>
+      <p:sp>
+        <p:nvSpPr>
+          <p:cNvPr id="23" name="TextBox 22"/>
+          <p:cNvSpPr txBox="1"/>
+          <p:nvPr/>
+        </p:nvSpPr>
+        <p:spPr>
+          <a:xfrm>
+            <a:off x="6144400" y="2730000"/>
+            <a:ext cx="2392400" cy="400000"/>
+          </a:xfrm>
+          <a:prstGeom prst="rect">
+            <a:avLst/>
+          </a:prstGeom>
+          <a:noFill/>
+        </p:spPr>
+        <p:txBody>
+          <a:bodyPr wrap="square">
+            <a:normAutofit/>
+          </a:bodyPr>
+          <a:lstStyle/>
+          <a:p>
+            <a:pPr algn="l"/>
+            <a:r>
+              <a:rPr b="0" sz="1300">
+                <a:solidFill>
+                  <a:srgbClr val="334A47"/>
+                </a:solidFill>
+              </a:rPr>
+              <a:t>• Sign language version for all video content</a:t>
+            </a:r>
+          </a:p>
+        </p:txBody>
+      </p:sp>
+      <p:sp>
+        <p:nvSpPr>
+          <p:cNvPr id="24" name="TextBox 23"/>
+          <p:cNvSpPr txBox="1"/>
+          <p:nvPr/>
+        </p:nvSpPr>
+        <p:spPr>
+          <a:xfrm>
+            <a:off x="6144400" y="3150000"/>
+            <a:ext cx="2392400" cy="400000"/>
+          </a:xfrm>
+          <a:prstGeom prst="rect">
+            <a:avLst/>
+          </a:prstGeom>
+          <a:noFill/>
+        </p:spPr>
+        <p:txBody>
+          <a:bodyPr wrap="square">
+            <a:normAutofit/>
+          </a:bodyPr>
+          <a:lstStyle/>
+          <a:p>
+            <a:pPr algn="l"/>
+            <a:r>
+              <a:rPr b="0" sz="1300">
+                <a:solidFill>
+                  <a:srgbClr val="334A47"/>
+                </a:solidFill>
+              </a:rPr>
+              <a:t>• Zero session timeouts — ever</a:t>
+            </a:r>
           </a:p>
         </p:txBody>
       </p:sp>
@@ -13847,7 +14692,7 @@
         </p:nvSpPr>
         <p:spPr>
           <a:xfrm>
-            <a:off x="1234440" y="4453128"/>
+            <a:off x="1234440" y="4325952"/>
             <a:ext cx="7406640" cy="384048"/>
           </a:xfrm>
           <a:prstGeom prst="rect">
@@ -13857,7 +14702,9 @@
           <a:ln/>
         </p:spPr>
         <p:txBody>
-          <a:bodyPr wrap="square" lIns="0" tIns="0" rIns="0" bIns="0" rtlCol="0" anchor="ctr"/>
+          <a:bodyPr wrap="square" lIns="0" tIns="0" rIns="0" bIns="0" rtlCol="0" anchor="ctr">
+            <a:normAutofit/>
+          </a:bodyPr>
           <a:lstStyle/>
           <a:p>
             <a:pPr indent="0" marL="0">
